--- a/dist/초4/영어/소리낱말문장/초4_영어_소리낱말문장_01_단모음소리.pptx
+++ b/dist/초4/영어/소리낱말문장/초4_영어_소리낱말문장_01_단모음소리.pptx
@@ -124,13 +124,13 @@
   <p:extLst>
     <p:ext uri="{521415D9-36F7-43E2-AB2F-B90AF26B5E84}">
       <p14:sectionLst xmlns:p14="http://schemas.microsoft.com/office/powerpoint/2010/main">
-        <p14:section name="도입" id="{b04711b6-1b4e-e838-4be5-eb998896fec2}">
+        <p14:section name="도입" id="{4b84d878-4352-6a44-6011-f4bedfdf0105}">
           <p14:sldIdLst>
             <p14:sldId id="256"/>
             <p14:sldId id="257"/>
           </p14:sldIdLst>
         </p14:section>
-        <p14:section name="개념" id="{6a726cd2-601c-1fc2-7610-7304afa3b1cb}">
+        <p14:section name="개념" id="{e3bbe6d1-dd42-54bf-80aa-fd7d7019d7f6}">
           <p14:sldIdLst>
             <p14:sldId id="258"/>
             <p14:sldId id="259"/>
@@ -141,7 +141,7 @@
             <p14:sldId id="265"/>
           </p14:sldIdLst>
         </p14:section>
-        <p14:section name="연습" id="{bccf4daa-3d6a-8b30-b7c7-c6858854de51}">
+        <p14:section name="연습" id="{0ecc6daa-2284-de37-357f-8d7a00cb2bce}">
           <p14:sldIdLst>
             <p14:sldId id="264"/>
             <p14:sldId id="266"/>
@@ -149,25 +149,25 @@
             <p14:sldId id="268"/>
           </p14:sldIdLst>
         </p14:section>
-        <p14:section name="개념" id="{37c213ae-12b4-4e3c-4581-cc3faf516bc8}">
+        <p14:section name="개념" id="{533413c1-229f-0982-5ac0-6d1eee48ed59}">
           <p14:sldIdLst/>
         </p14:section>
-        <p14:section name="연습" id="{e5e0611e-8f8a-4776-f5b9-f99da8523642}">
+        <p14:section name="연습" id="{47eb2b08-085c-8f2b-cea0-1b6a17346580}">
           <p14:sldIdLst/>
         </p14:section>
-        <p14:section name="확인" id="{7c95a896-e470-cbb1-573a-597114862349}">
+        <p14:section name="확인" id="{6035ef31-a227-ecd0-ee23-463f89444826}">
           <p14:sldIdLst>
             <p14:sldId id="269"/>
             <p14:sldId id="270"/>
             <p14:sldId id="271"/>
           </p14:sldIdLst>
         </p14:section>
-        <p14:section name="정리" id="{5797a294-15a8-d185-6019-4ef0ae26f952}">
+        <p14:section name="정리" id="{c2dfda0a-e8c3-e4cf-f80e-44e800ac95d9}">
           <p14:sldIdLst>
             <p14:sldId id="272"/>
           </p14:sldIdLst>
         </p14:section>
-        <p14:section name="보충" id="{8550c0e2-885b-ac7a-d822-6c1fd5a405c4}">
+        <p14:section name="보충" id="{c31862d5-b009-382d-755a-4913c1b01c37}">
           <p14:sldIdLst>
             <p14:sldId id="273"/>
           </p14:sldIdLst>

--- a/dist/초4/영어/소리낱말문장/초4_영어_소리낱말문장_01_단모음소리.pptx
+++ b/dist/초4/영어/소리낱말문장/초4_영어_소리낱말문장_01_단모음소리.pptx
@@ -124,13 +124,13 @@
   <p:extLst>
     <p:ext uri="{521415D9-36F7-43E2-AB2F-B90AF26B5E84}">
       <p14:sectionLst xmlns:p14="http://schemas.microsoft.com/office/powerpoint/2010/main">
-        <p14:section name="도입" id="{4b84d878-4352-6a44-6011-f4bedfdf0105}">
+        <p14:section name="도입" id="{c43ef63a-5dec-dde3-6a8f-50be17d5979e}">
           <p14:sldIdLst>
             <p14:sldId id="256"/>
             <p14:sldId id="257"/>
           </p14:sldIdLst>
         </p14:section>
-        <p14:section name="개념" id="{e3bbe6d1-dd42-54bf-80aa-fd7d7019d7f6}">
+        <p14:section name="개념" id="{6ec45b1c-e1ff-9c41-1e7c-5d3f6b1c8d55}">
           <p14:sldIdLst>
             <p14:sldId id="258"/>
             <p14:sldId id="259"/>
@@ -141,7 +141,7 @@
             <p14:sldId id="265"/>
           </p14:sldIdLst>
         </p14:section>
-        <p14:section name="연습" id="{0ecc6daa-2284-de37-357f-8d7a00cb2bce}">
+        <p14:section name="연습" id="{66852829-c5a0-0b2a-4b47-749c2f81b098}">
           <p14:sldIdLst>
             <p14:sldId id="264"/>
             <p14:sldId id="266"/>
@@ -149,25 +149,25 @@
             <p14:sldId id="268"/>
           </p14:sldIdLst>
         </p14:section>
-        <p14:section name="개념" id="{533413c1-229f-0982-5ac0-6d1eee48ed59}">
+        <p14:section name="개념" id="{20ec207a-841e-37a8-f3e0-e39d0e21d0b8}">
           <p14:sldIdLst/>
         </p14:section>
-        <p14:section name="연습" id="{47eb2b08-085c-8f2b-cea0-1b6a17346580}">
+        <p14:section name="연습" id="{91028b54-c9e4-e023-5167-e23d605f40e3}">
           <p14:sldIdLst/>
         </p14:section>
-        <p14:section name="확인" id="{6035ef31-a227-ecd0-ee23-463f89444826}">
+        <p14:section name="확인" id="{f0363e04-c919-07c5-4878-33dd0cd2ffbd}">
           <p14:sldIdLst>
             <p14:sldId id="269"/>
             <p14:sldId id="270"/>
             <p14:sldId id="271"/>
           </p14:sldIdLst>
         </p14:section>
-        <p14:section name="정리" id="{c2dfda0a-e8c3-e4cf-f80e-44e800ac95d9}">
+        <p14:section name="정리" id="{38473d7a-998f-0587-ca93-431ccaed1abb}">
           <p14:sldIdLst>
             <p14:sldId id="272"/>
           </p14:sldIdLst>
         </p14:section>
-        <p14:section name="보충" id="{c31862d5-b009-382d-755a-4913c1b01c37}">
+        <p14:section name="보충" id="{2c4fcd13-b8aa-4001-8548-94d27c7eeec3}">
           <p14:sldIdLst>
             <p14:sldId id="273"/>
           </p14:sldIdLst>
@@ -1480,7 +1480,7 @@
 막히면
 - 낱말 카드의 첫 글자를 손가락으로 짚으며 낱말을 천천히 말합니다.
 주의
-- 보충 뒤에도 소문자 이름이나 첫 글자 찾기가 어려우면 3학년 ‘소문자와 첫소리’(KR22-G03-ENG-LOWER-L01)를 먼저 다시 하고 이 차시를 시작합니다.</a:t>
+- 보충 뒤에도 소문자 이름이나 첫 글자 찾기가 어려우면 3학년 ‘자음 글자의 소리’(KR22-G03-ENG-CONSOUND-L01)나 ‘소문자와 첫소리’(KR22-G03-ENG-LOWER-L01)를 먼저 다시 하고 이 차시를 시작합니다.</a:t>
             </a:r>
             <a:endParaRPr lang="en-US" dirty="0"/>
           </a:p>
@@ -1569,7 +1569,7 @@
             <a:r>
               <a:rPr lang="en-US" dirty="0"/>
               <a:t>[S02 · 선수 학습 확인(소문자 이름과 첫소리)]
-목적: 3학년 ‘소문자와 첫소리’에서 배운 소문자 이름과 낱말의 첫 글자 찾기를 확인합니다. 오늘은 낱말 속 소리를 듣고 글자를 찾으므로 꼭 필요합니다.
+목적: 3학년 ‘소문자와 첫소리’·‘자음 글자의 소리’에서 배운 소문자 이름과 낱말의 첫 글자 찾기를 확인합니다. 오늘은 낱말 속 소리를 듣고 글자를 찾으므로 꼭 필요합니다.
 시간: 약 3분
 이렇게 말해 보세요
 - “①의 글자 이름을 하나씩 말해 줄래?”

--- a/dist/초4/영어/소리낱말문장/초4_영어_소리낱말문장_01_단모음소리.pptx
+++ b/dist/초4/영어/소리낱말문장/초4_영어_소리낱말문장_01_단모음소리.pptx
@@ -124,13 +124,13 @@
   <p:extLst>
     <p:ext uri="{521415D9-36F7-43E2-AB2F-B90AF26B5E84}">
       <p14:sectionLst xmlns:p14="http://schemas.microsoft.com/office/powerpoint/2010/main">
-        <p14:section name="도입" id="{c43ef63a-5dec-dde3-6a8f-50be17d5979e}">
+        <p14:section name="도입" id="{6999a00f-5328-1fed-93d3-9ecfc417495d}">
           <p14:sldIdLst>
             <p14:sldId id="256"/>
             <p14:sldId id="257"/>
           </p14:sldIdLst>
         </p14:section>
-        <p14:section name="개념" id="{6ec45b1c-e1ff-9c41-1e7c-5d3f6b1c8d55}">
+        <p14:section name="개념" id="{053649e7-cd1d-5128-ca55-29f445eb8c2c}">
           <p14:sldIdLst>
             <p14:sldId id="258"/>
             <p14:sldId id="259"/>
@@ -141,7 +141,7 @@
             <p14:sldId id="265"/>
           </p14:sldIdLst>
         </p14:section>
-        <p14:section name="연습" id="{66852829-c5a0-0b2a-4b47-749c2f81b098}">
+        <p14:section name="연습" id="{2b0ff81b-c1d1-9cab-82e5-a474561c1204}">
           <p14:sldIdLst>
             <p14:sldId id="264"/>
             <p14:sldId id="266"/>
@@ -149,25 +149,25 @@
             <p14:sldId id="268"/>
           </p14:sldIdLst>
         </p14:section>
-        <p14:section name="개념" id="{20ec207a-841e-37a8-f3e0-e39d0e21d0b8}">
+        <p14:section name="개념" id="{dfd9e06c-8066-ad43-1ff1-d5ac4472cab1}">
           <p14:sldIdLst/>
         </p14:section>
-        <p14:section name="연습" id="{91028b54-c9e4-e023-5167-e23d605f40e3}">
+        <p14:section name="연습" id="{d3eacce6-0cca-c77a-e273-54d6002f2a91}">
           <p14:sldIdLst/>
         </p14:section>
-        <p14:section name="확인" id="{f0363e04-c919-07c5-4878-33dd0cd2ffbd}">
+        <p14:section name="확인" id="{edadc865-1c0c-8566-1109-7205a01c1fd1}">
           <p14:sldIdLst>
             <p14:sldId id="269"/>
             <p14:sldId id="270"/>
             <p14:sldId id="271"/>
           </p14:sldIdLst>
         </p14:section>
-        <p14:section name="정리" id="{38473d7a-998f-0587-ca93-431ccaed1abb}">
+        <p14:section name="정리" id="{5cdff67b-33af-5993-a826-4b2d821fcc7a}">
           <p14:sldIdLst>
             <p14:sldId id="272"/>
           </p14:sldIdLst>
         </p14:section>
-        <p14:section name="보충" id="{2c4fcd13-b8aa-4001-8548-94d27c7eeec3}">
+        <p14:section name="보충" id="{5b79a9e6-8313-3a6d-3518-729ce780d5fe}">
           <p14:sldIdLst>
             <p14:sldId id="273"/>
           </p14:sldIdLst>
